--- a/日経ストックリーグ_成果報告.pptx
+++ b/日経ストックリーグ_成果報告.pptx
@@ -3859,7 +3859,7 @@
                 <a:ea typeface="Meiryo" pitchFamily="34" charset="-122"/>
                 <a:cs typeface="Meiryo" pitchFamily="34" charset="-120"/>
               </a:rPr>
-              <a:t>「なぜこの母集団か」という恣意性への疑問に、東証全上場4,438社を起点に体系的に再定義して回答 — JPX公式業種分類と証券DBテーマの和集合（1,039社）から後工程ニッチ102社を抽出</a:t>
+              <a:t>「なぜこの母集団か」という恣意性への疑問に、東証全上場4,438社を起点に体系的に再定義して回答 — JPX公式業種分類と証券DBテーマの和集合（1,039社）から後工程ニッチ106社を抽出</a:t>
             </a:r>
             <a:endParaRPr lang="en-US" sz="1050" dirty="0"/>
           </a:p>
@@ -14086,7 +14086,7 @@
                 <a:ea typeface="Meiryo" pitchFamily="34" charset="-122"/>
                 <a:cs typeface="Meiryo" pitchFamily="34" charset="-120"/>
               </a:rPr>
-              <a:t>ゲート基準750通りの感度分析で結論の頑健性を自己攻撃。母集団も東証4,438社から再定義（→102社）し、最終15社が揺るがないことを確認した。</a:t>
+              <a:t>ゲート基準750通りの感度分析で結論の頑健性を自己攻撃。母集団も東証4,438社から再定義（→106社）し、純度基準を緩めても最終15社が揺るがないことを確認した。</a:t>
             </a:r>
             <a:endParaRPr lang="en-US" sz="1050" dirty="0"/>
           </a:p>
@@ -18049,7 +18049,7 @@
                 <a:ea typeface="Meiryo" pitchFamily="34" charset="-122"/>
                 <a:cs typeface="Meiryo" pitchFamily="34" charset="-120"/>
               </a:rPr>
-              <a:t>102社</a:t>
+              <a:t>106社</a:t>
             </a:r>
             <a:endParaRPr lang="en-US" sz="2500" dirty="0"/>
           </a:p>
@@ -18144,7 +18144,7 @@
                 <a:ea typeface="Meiryo" pitchFamily="34" charset="-122"/>
                 <a:cs typeface="Meiryo" pitchFamily="34" charset="-120"/>
               </a:rPr>
-              <a:t>(4,438→1,039→102社)</a:t>
+              <a:t>(4,438→1,039→106社)</a:t>
             </a:r>
             <a:endParaRPr lang="en-US" sz="1000" dirty="0"/>
           </a:p>
@@ -23039,7 +23039,7 @@
                 <a:ea typeface="Meiryo" pitchFamily="34" charset="-122"/>
                 <a:cs typeface="Meiryo" pitchFamily="34" charset="-120"/>
               </a:rPr>
-              <a:t>102社 → 48社</a:t>
+              <a:t>106社 → 48社</a:t>
             </a:r>
             <a:endParaRPr lang="en-US" sz="1550" dirty="0"/>
           </a:p>
@@ -23489,7 +23489,7 @@
                 <a:ea typeface="Meiryo" pitchFamily="34" charset="-122"/>
                 <a:cs typeface="Meiryo" pitchFamily="34" charset="-120"/>
               </a:rPr>
-              <a:t>102</a:t>
+              <a:t>106</a:t>
             </a:r>
             <a:endParaRPr lang="en-US" sz="3000" dirty="0"/>
           </a:p>

--- a/日経ストックリーグ_成果報告.pptx
+++ b/日経ストックリーグ_成果報告.pptx
@@ -1791,7 +1791,7 @@
           <a:p>
             <a:r>
               <a:rPr lang="en-US" dirty="0"/>
-              <a:t>본론에 들어가기 전에, 이 대회가 뭔지 짧게 소개드리겠습니다. 닛케이 스톡리그는 니혼게이자이신문사가 여는 중고생·대학생 대상 투자 학습 대회입니다. 과제는 가상의 돈 500만엔으로 10에서 20종목을 골라 포트폴리오를 짜고, 그 '리포트'를 제출하는 것입니다. 여기서 가장 중요한 점 — 이 대회는 얼마를 벌었느냐로 평가하지 않습니다. 오직 리포트의 내용으로 심사합니다. 그래서 '왜 이 종목을 골랐는가'를 설명하는 게 전부입니다. 심사는 네 가지 시점 — 사회성, 조사·분석의 깊이, 분산투자·장기보유 이해, 학습 과정 — 을 보는데, 오늘 발표도 이 네 기둥을 따라갑니다. 저희 테마는 '반도체의 후공정과 지방'입니다. 후공정이 뭔지, 다음 슬라이드에서 먼저 설명드리겠습니다.</a:t>
+              <a:t>본론에 들어가기 전에, 이 대회가 뭔지 짧게 소개드리겠습니다. 닛케이 스톡리그는 니혼게이자이신문사가 여는 중고생·대학생 대상 투자 학습 대회입니다. 과제는 가상의 돈 500만엔으로 10에서 20종목을 골라 포트폴리오를 짜고, 그 '리포트'를 제출하는 것입니다. 여기서 가장 중요한 점 — 이 대회는 얼마를 벌었느냐로 평가하지 않습니다. 오직 리포트의 내용으로 심사합니다. 그래서 '왜 이 종목을 골랐는가'를 설명하는 게 전부입니다. 심사 포인트는 공식적으로 다섯 가지입니다 — 경제·주식투자의 이해, 포트폴리오의 창조성·유니크성, 표현력·문장력, 학습 열의·의욕, 그리고 대학·전문학교 부문에 한해 포트폴리오의 이론성·전문성. 오늘 발표도 이 기둥을 따라갑니다. 저희 테마는 '반도체의 후공정과 지방'입니다. 후공정이 뭔지, 다음 슬라이드에서 먼저 설명드리겠습니다.</a:t>
             </a:r>
             <a:endParaRPr lang="en-US" dirty="0"/>
           </a:p>
@@ -3940,7 +3940,7 @@
                 <a:ea typeface="Meiryo" pitchFamily="34" charset="-122"/>
                 <a:cs typeface="Meiryo" pitchFamily="34" charset="-120"/>
               </a:rPr>
-              <a:t>審査は「調査・分析の深さ」を見る — 結論の強さではなく、反証と限界を隠さない設計で応える。</a:t>
+              <a:t>審査の「ポートフォリオの理論性・専門性」に応える — 結論の強さではなく、反証と限界を隠さない設計で。</a:t>
             </a:r>
             <a:endParaRPr lang="en-US" sz="1250" dirty="0"/>
           </a:p>
@@ -11528,7 +11528,7 @@
                 <a:ea typeface="Meiryo" pitchFamily="34" charset="-122"/>
                 <a:cs typeface="Meiryo" pitchFamily="34" charset="-120"/>
               </a:rPr>
-              <a:t>分散投資と長期保有 — 審査基準への正面回答</a:t>
+              <a:t>分散投資と長期保有 — 「経済や株式投資の理解」への正面回答</a:t>
             </a:r>
             <a:endParaRPr lang="en-US" sz="2500" dirty="0"/>
           </a:p>
@@ -12477,7 +12477,7 @@
                 <a:ea typeface="Meiryo" pitchFamily="34" charset="-122"/>
                 <a:cs typeface="Meiryo" pitchFamily="34" charset="-120"/>
               </a:rPr>
-              <a:t>審査は評価額ではなくレポートを見る — 「分散投資・長期保有の理解」に、設計そのもので回答する。</a:t>
+              <a:t>審査は評価額ではなくレポートを見る — 「経済や株式投資の理解」に、設計そのもので回答する。</a:t>
             </a:r>
             <a:endParaRPr lang="en-US" sz="1250" dirty="0"/>
           </a:p>
@@ -14125,7 +14125,7 @@
                 <a:ea typeface="Meiryo" pitchFamily="34" charset="-122"/>
                 <a:cs typeface="Meiryo" pitchFamily="34" charset="-120"/>
               </a:rPr>
-              <a:t>審査基準「学習の過程」に対して — 成功だけでなく、試行錯誤の記録をそのまま提出する。</a:t>
+              <a:t>審査ポイント「学習への熱意・意気込み」に対して — 成功だけでなく、試行錯誤の記録をそのまま提出する。</a:t>
             </a:r>
             <a:endParaRPr lang="en-US" sz="1250" dirty="0"/>
           </a:p>
@@ -16066,7 +16066,7 @@
                 <a:ea typeface="Meiryo" pitchFamily="34" charset="-122"/>
                 <a:cs typeface="Meiryo" pitchFamily="34" charset="-120"/>
               </a:rPr>
-              <a:t>審査の4つの視点（＝このあとの発表の柱）</a:t>
+              <a:t>レポート審査のポイント（＝このあとの発表の柱）</a:t>
             </a:r>
             <a:endParaRPr lang="en-US" sz="1300" dirty="0"/>
           </a:p>
@@ -16168,7 +16168,7 @@
                 <a:ea typeface="Meiryo" pitchFamily="34" charset="-122"/>
                 <a:cs typeface="Meiryo" pitchFamily="34" charset="-120"/>
               </a:rPr>
-              <a:t>社会性　</a:t>
+              <a:t>経済や株式投資の理解　</a:t>
             </a:r>
             <a:pPr indent="0" marL="0">
               <a:buNone/>
@@ -16182,7 +16182,7 @@
                 <a:ea typeface="Meiryo" pitchFamily="34" charset="-122"/>
                 <a:cs typeface="Meiryo" pitchFamily="34" charset="-120"/>
               </a:rPr>
-              <a:t>テーマが社会課題とつながっているか</a:t>
+              <a:t>経済と株式投資をどれだけ理解したか</a:t>
             </a:r>
             <a:endParaRPr lang="en-US" sz="1250" dirty="0"/>
           </a:p>
@@ -16284,7 +16284,7 @@
                 <a:ea typeface="Meiryo" pitchFamily="34" charset="-122"/>
                 <a:cs typeface="Meiryo" pitchFamily="34" charset="-120"/>
               </a:rPr>
-              <a:t>調査・分析の深さ　</a:t>
+              <a:t>ポートフォリオの創造性・ユニーク性　</a:t>
             </a:r>
             <a:pPr indent="0" marL="0">
               <a:buNone/>
@@ -16298,7 +16298,7 @@
                 <a:ea typeface="Meiryo" pitchFamily="34" charset="-122"/>
                 <a:cs typeface="Meiryo" pitchFamily="34" charset="-120"/>
               </a:rPr>
-              <a:t>どれだけ丁寧に調べ、検証したか</a:t>
+              <a:t>テーマと銘柄選定が独創的か</a:t>
             </a:r>
             <a:endParaRPr lang="en-US" sz="1250" dirty="0"/>
           </a:p>
@@ -16400,7 +16400,7 @@
                 <a:ea typeface="Meiryo" pitchFamily="34" charset="-122"/>
                 <a:cs typeface="Meiryo" pitchFamily="34" charset="-120"/>
               </a:rPr>
-              <a:t>分散投資・長期保有の理解　</a:t>
+              <a:t>表現力・文章力　</a:t>
             </a:r>
             <a:pPr indent="0" marL="0">
               <a:buNone/>
@@ -16414,7 +16414,7 @@
                 <a:ea typeface="Meiryo" pitchFamily="34" charset="-122"/>
                 <a:cs typeface="Meiryo" pitchFamily="34" charset="-120"/>
               </a:rPr>
-              <a:t>リスクを分け、長く持つ設計か</a:t>
+              <a:t>レポートで明確に伝えられているか</a:t>
             </a:r>
             <a:endParaRPr lang="en-US" sz="1250" dirty="0"/>
           </a:p>
@@ -16516,7 +16516,7 @@
                 <a:ea typeface="Meiryo" pitchFamily="34" charset="-122"/>
                 <a:cs typeface="Meiryo" pitchFamily="34" charset="-120"/>
               </a:rPr>
-              <a:t>学習の過程　</a:t>
+              <a:t>学習への熱意・意気込み　</a:t>
             </a:r>
             <a:pPr indent="0" marL="0">
               <a:buNone/>
@@ -16530,7 +16530,7 @@
                 <a:ea typeface="Meiryo" pitchFamily="34" charset="-122"/>
                 <a:cs typeface="Meiryo" pitchFamily="34" charset="-120"/>
               </a:rPr>
-              <a:t>失敗も含め、どう学んだか</a:t>
+              <a:t>アンケート・企業取材などの踏み込み</a:t>
             </a:r>
             <a:endParaRPr lang="en-US" sz="1250" dirty="0"/>
           </a:p>
@@ -16622,6 +16622,45 @@
               <a:t>　— まず“後工程”を、次のスライドで説明します。</a:t>
             </a:r>
             <a:endParaRPr lang="en-US" sz="1350" dirty="0"/>
+          </a:p>
+        </p:txBody>
+      </p:sp>
+      <p:sp>
+        <p:nvSpPr>
+          <p:cNvPr id="29" name="Text 29"/>
+          <p:cNvSpPr/>
+          <p:nvPr/>
+        </p:nvSpPr>
+        <p:spPr>
+          <a:xfrm>
+            <a:off x="6940296" y="5102352"/>
+            <a:ext cx="4465015" cy="274320"/>
+          </a:xfrm>
+          <a:prstGeom prst="rect">
+            <a:avLst/>
+          </a:prstGeom>
+          <a:noFill/>
+          <a:ln/>
+        </p:spPr>
+        <p:txBody>
+          <a:bodyPr wrap="square" lIns="0" tIns="0" rIns="0" bIns="0" rtlCol="0" anchor="ctr"/>
+          <a:lstStyle/>
+          <a:p>
+            <a:pPr indent="0" marL="0">
+              <a:buNone/>
+            </a:pPr>
+            <a:r>
+              <a:rPr lang="en-US" sz="900" dirty="0">
+                <a:solidFill>
+                  <a:srgbClr val="8A9AA8"/>
+                </a:solidFill>
+                <a:latin typeface="Meiryo" pitchFamily="34" charset="0"/>
+                <a:ea typeface="Meiryo" pitchFamily="34" charset="-122"/>
+                <a:cs typeface="Meiryo" pitchFamily="34" charset="-120"/>
+              </a:rPr>
+              <a:t>＋ 大学・専門学校部門のみ：ポートフォリオの理論性・専門性</a:t>
+            </a:r>
+            <a:endParaRPr lang="en-US" sz="900" dirty="0"/>
           </a:p>
         </p:txBody>
       </p:sp>

--- a/日経ストックリーグ_成果報告.pptx
+++ b/日経ストックリーグ_成果報告.pptx
@@ -6,6 +6,7 @@
   </p:sldMasterIdLst>
   <p:sldIdLst>
     <p:sldId id="256" r:id="rId2"/>
+    <p:sldId id="273" r:id="rId24"/>
     <p:sldId id="257" r:id="rId3"/>
     <p:sldId id="258" r:id="rId4"/>
     <p:sldId id="259" r:id="rId5"/>
@@ -1745,6 +1746,94 @@
 </p:notes>
 </file>
 
+<file path=ppt/notesSlides/notesSlide18.xml><?xml version="1.0" encoding="utf-8"?>
+<p:notes xmlns:a="http://schemas.openxmlformats.org/drawingml/2006/main" xmlns:r="http://schemas.openxmlformats.org/officeDocument/2006/relationships" xmlns:p="http://schemas.openxmlformats.org/presentationml/2006/main">
+  <p:cSld>
+    <p:spTree>
+      <p:nvGrpSpPr>
+        <p:cNvPr id="1" name=""/>
+        <p:cNvGrpSpPr/>
+        <p:nvPr/>
+      </p:nvGrpSpPr>
+      <p:grpSpPr>
+        <a:xfrm>
+          <a:off x="0" y="0"/>
+          <a:ext cx="0" cy="0"/>
+          <a:chOff x="0" y="0"/>
+          <a:chExt cx="0" cy="0"/>
+        </a:xfrm>
+      </p:grpSpPr>
+      <p:sp>
+        <p:nvSpPr>
+          <p:cNvPr id="2" name="Slide Image Placeholder 1"/>
+          <p:cNvSpPr>
+            <a:spLocks noGrp="1" noRot="1" noChangeAspect="1"/>
+          </p:cNvSpPr>
+          <p:nvPr>
+            <p:ph type="sldImg"/>
+          </p:nvPr>
+        </p:nvSpPr>
+        <p:spPr/>
+      </p:sp>
+      <p:sp>
+        <p:nvSpPr>
+          <p:cNvPr id="3" name="Notes Placeholder 2"/>
+          <p:cNvSpPr>
+            <a:spLocks noGrp="1"/>
+          </p:cNvSpPr>
+          <p:nvPr>
+            <p:ph type="body" idx="1"/>
+          </p:nvPr>
+        </p:nvSpPr>
+        <p:spPr/>
+        <p:txBody>
+          <a:bodyPr/>
+          <a:lstStyle/>
+          <a:p>
+            <a:r>
+              <a:rPr lang="en-US" dirty="0"/>
+              <a:t>오늘 발표의 흐름입니다. 크게 다섯 덩어리입니다. 먼저 도입에서 이 대회가 뭔지와 후공정이 뭔지를 짧게 잡고, 전체 요약을 한 장으로 보여드립니다. 그다음이 본론입니다 — 테마와 가설을 세우고 구마모토와 도호쿠에서 실증한 뒤, 어떻게 종목을 골랐는지와 최종 포트폴리오를 설명합니다. 마지막으로 리스크와 학습 과정, 앞으로의 계획을 말씀드립니다. 가장 중요한 부분은 네 번째 덩어리, 선정과 포트폴리오입니다. 시간이 부족하면 앞의 도입을 줄이고 여기에 시간을 쓰겠습니다.</a:t>
+            </a:r>
+            <a:endParaRPr lang="en-US" dirty="0"/>
+          </a:p>
+        </p:txBody>
+      </p:sp>
+      <p:sp>
+        <p:nvSpPr>
+          <p:cNvPr id="4" name="Slide Number Placeholder 3"/>
+          <p:cNvSpPr>
+            <a:spLocks noGrp="1"/>
+          </p:cNvSpPr>
+          <p:nvPr>
+            <p:ph type="sldNum" sz="quarter" idx="10"/>
+          </p:nvPr>
+        </p:nvSpPr>
+        <p:spPr/>
+        <p:txBody>
+          <a:bodyPr/>
+          <a:lstStyle/>
+          <a:p>
+            <a:fld id="{F7021451-1387-4CA6-816F-3879F97B5CBC}" type="slidenum">
+              <a:rPr lang="en-US"/>
+              <a:t>2</a:t>
+            </a:fld>
+            <a:endParaRPr lang="en-US"/>
+          </a:p>
+        </p:txBody>
+      </p:sp>
+    </p:spTree>
+    <p:extLst>
+      <p:ext uri="{BB962C8B-B14F-4D97-AF65-F5344CB8AC3E}">
+        <p14:creationId xmlns:p14="http://schemas.microsoft.com/office/powerpoint/2010/main" val="1024086991"/>
+      </p:ext>
+    </p:extLst>
+  </p:cSld>
+  <p:clrMapOvr>
+    <a:masterClrMapping/>
+  </p:clrMapOvr>
+</p:notes>
+</file>
+
 <file path=ppt/notesSlides/notesSlide2.xml><?xml version="1.0" encoding="utf-8"?>
 <p:notes xmlns:a="http://schemas.openxmlformats.org/drawingml/2006/main" xmlns:r="http://schemas.openxmlformats.org/officeDocument/2006/relationships" xmlns:p="http://schemas.openxmlformats.org/presentationml/2006/main">
   <p:cSld>
@@ -3340,7 +3429,7 @@
                 <a:ea typeface="Meiryo" pitchFamily="34" charset="-122"/>
                 <a:cs typeface="Meiryo" pitchFamily="34" charset="-120"/>
               </a:rPr>
-              <a:t>10</a:t>
+              <a:t>11</a:t>
             </a:r>
             <a:endParaRPr lang="en-US" sz="900" dirty="0"/>
           </a:p>
@@ -4194,7 +4283,7 @@
                 <a:ea typeface="Meiryo" pitchFamily="34" charset="-122"/>
                 <a:cs typeface="Meiryo" pitchFamily="34" charset="-120"/>
               </a:rPr>
-              <a:t>11</a:t>
+              <a:t>12</a:t>
             </a:r>
             <a:endParaRPr lang="en-US" sz="900" dirty="0"/>
           </a:p>
@@ -11134,7 +11223,7 @@
                 <a:ea typeface="Meiryo" pitchFamily="34" charset="-122"/>
                 <a:cs typeface="Meiryo" pitchFamily="34" charset="-120"/>
               </a:rPr>
-              <a:t>12</a:t>
+              <a:t>13</a:t>
             </a:r>
             <a:endParaRPr lang="en-US" sz="900" dirty="0"/>
           </a:p>
@@ -11672,7 +11761,7 @@
                 <a:ea typeface="Meiryo" pitchFamily="34" charset="-122"/>
                 <a:cs typeface="Meiryo" pitchFamily="34" charset="-120"/>
               </a:rPr>
-              <a:t>13</a:t>
+              <a:t>14</a:t>
             </a:r>
             <a:endParaRPr lang="en-US" sz="900" dirty="0"/>
           </a:p>
@@ -12731,7 +12820,7 @@
                 <a:ea typeface="Meiryo" pitchFamily="34" charset="-122"/>
                 <a:cs typeface="Meiryo" pitchFamily="34" charset="-120"/>
               </a:rPr>
-              <a:t>14</a:t>
+              <a:t>15</a:t>
             </a:r>
             <a:endParaRPr lang="en-US" sz="900" dirty="0"/>
           </a:p>
@@ -13522,7 +13611,7 @@
                 <a:ea typeface="Meiryo" pitchFamily="34" charset="-122"/>
                 <a:cs typeface="Meiryo" pitchFamily="34" charset="-120"/>
               </a:rPr>
-              <a:t>15</a:t>
+              <a:t>16</a:t>
             </a:r>
             <a:endParaRPr lang="en-US" sz="900" dirty="0"/>
           </a:p>
@@ -14379,7 +14468,7 @@
                 <a:ea typeface="Meiryo" pitchFamily="34" charset="-122"/>
                 <a:cs typeface="Meiryo" pitchFamily="34" charset="-120"/>
               </a:rPr>
-              <a:t>16</a:t>
+              <a:t>17</a:t>
             </a:r>
             <a:endParaRPr lang="en-US" sz="900" dirty="0"/>
           </a:p>
@@ -15558,6 +15647,894 @@
 </p:sld>
 </file>
 
+<file path=ppt/slides/slide18.xml><?xml version="1.0" encoding="utf-8"?>
+<p:sld xmlns:a="http://schemas.openxmlformats.org/drawingml/2006/main" xmlns:r="http://schemas.openxmlformats.org/officeDocument/2006/relationships" xmlns:p="http://schemas.openxmlformats.org/presentationml/2006/main">
+  <p:cSld name="Contents">
+    <p:bg>
+      <p:bgPr>
+        <a:solidFill>
+          <a:srgbClr val="FFFFFF"/>
+        </a:solidFill>
+      </p:bgPr>
+    </p:bg>
+    <p:spTree>
+      <p:nvGrpSpPr>
+        <p:cNvPr id="1" name=""/>
+        <p:cNvGrpSpPr/>
+        <p:nvPr/>
+      </p:nvGrpSpPr>
+      <p:grpSpPr>
+        <a:xfrm>
+          <a:off x="0" y="0"/>
+          <a:ext cx="0" cy="0"/>
+          <a:chOff x="0" y="0"/>
+          <a:chExt cx="0" cy="0"/>
+        </a:xfrm>
+      </p:grpSpPr>
+      <p:sp>
+        <p:nvSpPr>
+          <p:cNvPr id="2" name="Eyebrow"/>
+          <p:cNvSpPr/>
+          <p:nvPr/>
+        </p:nvSpPr>
+        <p:spPr>
+          <a:xfrm>
+            <a:off x="548640" y="292608"/>
+            <a:ext cx="8686800" cy="292608"/>
+          </a:xfrm>
+          <a:prstGeom prst="rect">
+            <a:avLst/>
+          </a:prstGeom>
+          <a:noFill/>
+          <a:ln/>
+        </p:spPr>
+        <p:txBody>
+          <a:bodyPr wrap="square" lIns="0" tIns="0" rIns="0" bIns="0" rtlCol="0" anchor="ctr"/>
+          <a:lstStyle/>
+          <a:p>
+            <a:pPr indent="0" marL="0">
+              <a:buNone/>
+            </a:pPr>
+            <a:r>
+              <a:rPr lang="en-US" sz="1100" b="1" dirty="0">
+                <a:solidFill>
+                  <a:srgbClr val="C0713A"/>
+                </a:solidFill>
+                <a:latin typeface="Meiryo" pitchFamily="34" charset="0"/>
+                <a:ea typeface="Meiryo" pitchFamily="34" charset="-122"/>
+                <a:cs typeface="Meiryo" pitchFamily="34" charset="-120"/>
+              </a:rPr>
+              <a:t>CONTENTS</a:t>
+            </a:r>
+            <a:endParaRPr lang="en-US" sz="1200" dirty="0"/>
+          </a:p>
+        </p:txBody>
+      </p:sp>
+      <p:sp>
+        <p:nvSpPr>
+          <p:cNvPr id="3" name="Title"/>
+          <p:cNvSpPr/>
+          <p:nvPr/>
+        </p:nvSpPr>
+        <p:spPr>
+          <a:xfrm>
+            <a:off x="548640" y="548640"/>
+            <a:ext cx="10058400" cy="566928"/>
+          </a:xfrm>
+          <a:prstGeom prst="rect">
+            <a:avLst/>
+          </a:prstGeom>
+          <a:noFill/>
+          <a:ln/>
+        </p:spPr>
+        <p:txBody>
+          <a:bodyPr wrap="square" lIns="0" tIns="0" rIns="0" bIns="0" rtlCol="0" anchor="ctr"/>
+          <a:lstStyle/>
+          <a:p>
+            <a:pPr indent="0" marL="0">
+              <a:buNone/>
+            </a:pPr>
+            <a:r>
+              <a:rPr lang="en-US" sz="2300" b="1" dirty="0">
+                <a:solidFill>
+                  <a:srgbClr val="1C2B4A"/>
+                </a:solidFill>
+                <a:latin typeface="Meiryo" pitchFamily="34" charset="0"/>
+                <a:ea typeface="Meiryo" pitchFamily="34" charset="-122"/>
+                <a:cs typeface="Meiryo" pitchFamily="34" charset="-120"/>
+              </a:rPr>
+              <a:t>目次</a:t>
+            </a:r>
+            <a:endParaRPr lang="en-US" sz="1200" dirty="0"/>
+          </a:p>
+        </p:txBody>
+      </p:sp>
+      <p:sp>
+        <p:nvSpPr>
+          <p:cNvPr id="4" name="Badge 1"/>
+          <p:cNvSpPr/>
+          <p:nvPr/>
+        </p:nvSpPr>
+        <p:spPr>
+          <a:xfrm>
+            <a:off x="822960" y="1700784"/>
+            <a:ext cx="457200" cy="457200"/>
+          </a:xfrm>
+          <a:prstGeom prst="ellipse">
+            <a:avLst/>
+          </a:prstGeom>
+          <a:solidFill>
+            <a:srgbClr val="C0713A"/>
+          </a:solidFill>
+          <a:ln/>
+        </p:spPr>
+        <p:txBody>
+          <a:bodyPr wrap="square" lIns="0" tIns="0" rIns="0" bIns="0" rtlCol="0" anchor="ctr"/>
+          <a:lstStyle/>
+          <a:p>
+            <a:pPr algn="ctr" indent="0" marL="0">
+              <a:buNone/>
+            </a:pPr>
+            <a:r>
+              <a:rPr lang="en-US" sz="1600" b="1" dirty="0">
+                <a:solidFill>
+                  <a:srgbClr val="FFFFFF"/>
+                </a:solidFill>
+                <a:latin typeface="Meiryo" pitchFamily="34" charset="0"/>
+                <a:ea typeface="Meiryo" pitchFamily="34" charset="-122"/>
+                <a:cs typeface="Meiryo" pitchFamily="34" charset="-120"/>
+              </a:rPr>
+              <a:t>1</a:t>
+            </a:r>
+            <a:endParaRPr lang="en-US" sz="1600" dirty="0"/>
+          </a:p>
+        </p:txBody>
+      </p:sp>
+      <p:sp>
+        <p:nvSpPr>
+          <p:cNvPr id="5" name="Row 1"/>
+          <p:cNvSpPr/>
+          <p:nvPr/>
+        </p:nvSpPr>
+        <p:spPr>
+          <a:xfrm>
+            <a:off x="1463040" y="1645920"/>
+            <a:ext cx="8595360" cy="566928"/>
+          </a:xfrm>
+          <a:prstGeom prst="rect">
+            <a:avLst/>
+          </a:prstGeom>
+          <a:noFill/>
+          <a:ln/>
+        </p:spPr>
+        <p:txBody>
+          <a:bodyPr wrap="square" lIns="0" tIns="0" rIns="0" bIns="0" rtlCol="0" anchor="ctr"/>
+          <a:lstStyle/>
+          <a:p>
+            <a:pPr indent="0" marL="0">
+              <a:buNone/>
+            </a:pPr>
+            <a:r>
+              <a:rPr lang="en-US" sz="1500" b="1" dirty="0">
+                <a:solidFill>
+                  <a:srgbClr val="1C2B4A"/>
+                </a:solidFill>
+                <a:latin typeface="Meiryo" pitchFamily="34" charset="0"/>
+                <a:ea typeface="Meiryo" pitchFamily="34" charset="-122"/>
+                <a:cs typeface="Meiryo" pitchFamily="34" charset="-120"/>
+              </a:rPr>
+              <a:t>導入　</a:t>
+            </a:r>
+            <a:r>
+              <a:rPr lang="en-US" sz="1050" dirty="0">
+                <a:solidFill>
+                  <a:srgbClr val="5B6B7F"/>
+                </a:solidFill>
+                <a:latin typeface="Meiryo" pitchFamily="34" charset="0"/>
+                <a:ea typeface="Meiryo" pitchFamily="34" charset="-122"/>
+                <a:cs typeface="Meiryo" pitchFamily="34" charset="-120"/>
+              </a:rPr>
+              <a:t>このコンテストとは？ ・ 後工程とは？</a:t>
+            </a:r>
+            <a:endParaRPr lang="en-US" sz="1200" dirty="0"/>
+          </a:p>
+        </p:txBody>
+      </p:sp>
+      <p:sp>
+        <p:nvSpPr>
+          <p:cNvPr id="6" name="Page 1"/>
+          <p:cNvSpPr/>
+          <p:nvPr/>
+        </p:nvSpPr>
+        <p:spPr>
+          <a:xfrm>
+            <a:off x="10241280" y="1645920"/>
+            <a:ext cx="1399032" cy="566928"/>
+          </a:xfrm>
+          <a:prstGeom prst="rect">
+            <a:avLst/>
+          </a:prstGeom>
+          <a:noFill/>
+          <a:ln/>
+        </p:spPr>
+        <p:txBody>
+          <a:bodyPr wrap="square" lIns="0" tIns="0" rIns="0" bIns="0" rtlCol="0" anchor="ctr"/>
+          <a:lstStyle/>
+          <a:p>
+            <a:pPr algn="r" indent="0" marL="0">
+              <a:buNone/>
+            </a:pPr>
+            <a:r>
+              <a:rPr lang="en-US" sz="1200" dirty="0">
+                <a:solidFill>
+                  <a:srgbClr val="8A9AA8"/>
+                </a:solidFill>
+                <a:latin typeface="Meiryo" pitchFamily="34" charset="0"/>
+                <a:ea typeface="Meiryo" pitchFamily="34" charset="-122"/>
+                <a:cs typeface="Meiryo" pitchFamily="34" charset="-120"/>
+              </a:rPr>
+              <a:t>p.3–4</a:t>
+            </a:r>
+            <a:endParaRPr lang="en-US" sz="1200" dirty="0"/>
+          </a:p>
+        </p:txBody>
+      </p:sp>
+      <p:sp>
+        <p:nvSpPr>
+          <p:cNvPr id="7" name="Badge 2"/>
+          <p:cNvSpPr/>
+          <p:nvPr/>
+        </p:nvSpPr>
+        <p:spPr>
+          <a:xfrm>
+            <a:off x="822960" y="2523744"/>
+            <a:ext cx="457200" cy="457200"/>
+          </a:xfrm>
+          <a:prstGeom prst="ellipse">
+            <a:avLst/>
+          </a:prstGeom>
+          <a:solidFill>
+            <a:srgbClr val="1C2B4A"/>
+          </a:solidFill>
+          <a:ln/>
+        </p:spPr>
+        <p:txBody>
+          <a:bodyPr wrap="square" lIns="0" tIns="0" rIns="0" bIns="0" rtlCol="0" anchor="ctr"/>
+          <a:lstStyle/>
+          <a:p>
+            <a:pPr algn="ctr" indent="0" marL="0">
+              <a:buNone/>
+            </a:pPr>
+            <a:r>
+              <a:rPr lang="en-US" sz="1600" b="1" dirty="0">
+                <a:solidFill>
+                  <a:srgbClr val="FFFFFF"/>
+                </a:solidFill>
+                <a:latin typeface="Meiryo" pitchFamily="34" charset="0"/>
+                <a:ea typeface="Meiryo" pitchFamily="34" charset="-122"/>
+                <a:cs typeface="Meiryo" pitchFamily="34" charset="-120"/>
+              </a:rPr>
+              <a:t>2</a:t>
+            </a:r>
+            <a:endParaRPr lang="en-US" sz="1600" dirty="0"/>
+          </a:p>
+        </p:txBody>
+      </p:sp>
+      <p:sp>
+        <p:nvSpPr>
+          <p:cNvPr id="8" name="Row 2"/>
+          <p:cNvSpPr/>
+          <p:nvPr/>
+        </p:nvSpPr>
+        <p:spPr>
+          <a:xfrm>
+            <a:off x="1463040" y="2468880"/>
+            <a:ext cx="8595360" cy="566928"/>
+          </a:xfrm>
+          <a:prstGeom prst="rect">
+            <a:avLst/>
+          </a:prstGeom>
+          <a:noFill/>
+          <a:ln/>
+        </p:spPr>
+        <p:txBody>
+          <a:bodyPr wrap="square" lIns="0" tIns="0" rIns="0" bIns="0" rtlCol="0" anchor="ctr"/>
+          <a:lstStyle/>
+          <a:p>
+            <a:pPr indent="0" marL="0">
+              <a:buNone/>
+            </a:pPr>
+            <a:r>
+              <a:rPr lang="en-US" sz="1500" b="1" dirty="0">
+                <a:solidFill>
+                  <a:srgbClr val="1C2B4A"/>
+                </a:solidFill>
+                <a:latin typeface="Meiryo" pitchFamily="34" charset="0"/>
+                <a:ea typeface="Meiryo" pitchFamily="34" charset="-122"/>
+                <a:cs typeface="Meiryo" pitchFamily="34" charset="-120"/>
+              </a:rPr>
+              <a:t>全体サマリー　</a:t>
+            </a:r>
+            <a:r>
+              <a:rPr lang="en-US" sz="1050" dirty="0">
+                <a:solidFill>
+                  <a:srgbClr val="5B6B7F"/>
+                </a:solidFill>
+                <a:latin typeface="Meiryo" pitchFamily="34" charset="0"/>
+                <a:ea typeface="Meiryo" pitchFamily="34" charset="-122"/>
+                <a:cs typeface="Meiryo" pitchFamily="34" charset="-120"/>
+              </a:rPr>
+              <a:t>4,438社 → 15社 を一枚で</a:t>
+            </a:r>
+            <a:endParaRPr lang="en-US" sz="1200" dirty="0"/>
+          </a:p>
+        </p:txBody>
+      </p:sp>
+      <p:sp>
+        <p:nvSpPr>
+          <p:cNvPr id="9" name="Page 2"/>
+          <p:cNvSpPr/>
+          <p:nvPr/>
+        </p:nvSpPr>
+        <p:spPr>
+          <a:xfrm>
+            <a:off x="10241280" y="2468880"/>
+            <a:ext cx="1399032" cy="566928"/>
+          </a:xfrm>
+          <a:prstGeom prst="rect">
+            <a:avLst/>
+          </a:prstGeom>
+          <a:noFill/>
+          <a:ln/>
+        </p:spPr>
+        <p:txBody>
+          <a:bodyPr wrap="square" lIns="0" tIns="0" rIns="0" bIns="0" rtlCol="0" anchor="ctr"/>
+          <a:lstStyle/>
+          <a:p>
+            <a:pPr algn="r" indent="0" marL="0">
+              <a:buNone/>
+            </a:pPr>
+            <a:r>
+              <a:rPr lang="en-US" sz="1200" dirty="0">
+                <a:solidFill>
+                  <a:srgbClr val="8A9AA8"/>
+                </a:solidFill>
+                <a:latin typeface="Meiryo" pitchFamily="34" charset="0"/>
+                <a:ea typeface="Meiryo" pitchFamily="34" charset="-122"/>
+                <a:cs typeface="Meiryo" pitchFamily="34" charset="-120"/>
+              </a:rPr>
+              <a:t>p.5</a:t>
+            </a:r>
+            <a:endParaRPr lang="en-US" sz="1200" dirty="0"/>
+          </a:p>
+        </p:txBody>
+      </p:sp>
+      <p:sp>
+        <p:nvSpPr>
+          <p:cNvPr id="10" name="Badge 3"/>
+          <p:cNvSpPr/>
+          <p:nvPr/>
+        </p:nvSpPr>
+        <p:spPr>
+          <a:xfrm>
+            <a:off x="822960" y="3346704"/>
+            <a:ext cx="457200" cy="457200"/>
+          </a:xfrm>
+          <a:prstGeom prst="ellipse">
+            <a:avLst/>
+          </a:prstGeom>
+          <a:solidFill>
+            <a:srgbClr val="C0713A"/>
+          </a:solidFill>
+          <a:ln/>
+        </p:spPr>
+        <p:txBody>
+          <a:bodyPr wrap="square" lIns="0" tIns="0" rIns="0" bIns="0" rtlCol="0" anchor="ctr"/>
+          <a:lstStyle/>
+          <a:p>
+            <a:pPr algn="ctr" indent="0" marL="0">
+              <a:buNone/>
+            </a:pPr>
+            <a:r>
+              <a:rPr lang="en-US" sz="1600" b="1" dirty="0">
+                <a:solidFill>
+                  <a:srgbClr val="FFFFFF"/>
+                </a:solidFill>
+                <a:latin typeface="Meiryo" pitchFamily="34" charset="0"/>
+                <a:ea typeface="Meiryo" pitchFamily="34" charset="-122"/>
+                <a:cs typeface="Meiryo" pitchFamily="34" charset="-120"/>
+              </a:rPr>
+              <a:t>3</a:t>
+            </a:r>
+            <a:endParaRPr lang="en-US" sz="1600" dirty="0"/>
+          </a:p>
+        </p:txBody>
+      </p:sp>
+      <p:sp>
+        <p:nvSpPr>
+          <p:cNvPr id="11" name="Row 3"/>
+          <p:cNvSpPr/>
+          <p:nvPr/>
+        </p:nvSpPr>
+        <p:spPr>
+          <a:xfrm>
+            <a:off x="1463040" y="3291840"/>
+            <a:ext cx="8595360" cy="566928"/>
+          </a:xfrm>
+          <a:prstGeom prst="rect">
+            <a:avLst/>
+          </a:prstGeom>
+          <a:noFill/>
+          <a:ln/>
+        </p:spPr>
+        <p:txBody>
+          <a:bodyPr wrap="square" lIns="0" tIns="0" rIns="0" bIns="0" rtlCol="0" anchor="ctr"/>
+          <a:lstStyle/>
+          <a:p>
+            <a:pPr indent="0" marL="0">
+              <a:buNone/>
+            </a:pPr>
+            <a:r>
+              <a:rPr lang="en-US" sz="1500" b="1" dirty="0">
+                <a:solidFill>
+                  <a:srgbClr val="1C2B4A"/>
+                </a:solidFill>
+                <a:latin typeface="Meiryo" pitchFamily="34" charset="0"/>
+                <a:ea typeface="Meiryo" pitchFamily="34" charset="-122"/>
+                <a:cs typeface="Meiryo" pitchFamily="34" charset="-120"/>
+              </a:rPr>
+              <a:t>テーマ・仮説・実証　</a:t>
+            </a:r>
+            <a:r>
+              <a:rPr lang="en-US" sz="1050" dirty="0">
+                <a:solidFill>
+                  <a:srgbClr val="5B6B7F"/>
+                </a:solidFill>
+                <a:latin typeface="Meiryo" pitchFamily="34" charset="0"/>
+                <a:ea typeface="Meiryo" pitchFamily="34" charset="-122"/>
+                <a:cs typeface="Meiryo" pitchFamily="34" charset="-120"/>
+              </a:rPr>
+              <a:t>社会的意義 ・ 近接性の理論 ・ 熊本 ・ 東北</a:t>
+            </a:r>
+            <a:endParaRPr lang="en-US" sz="1200" dirty="0"/>
+          </a:p>
+        </p:txBody>
+      </p:sp>
+      <p:sp>
+        <p:nvSpPr>
+          <p:cNvPr id="12" name="Page 3"/>
+          <p:cNvSpPr/>
+          <p:nvPr/>
+        </p:nvSpPr>
+        <p:spPr>
+          <a:xfrm>
+            <a:off x="10241280" y="3291840"/>
+            <a:ext cx="1399032" cy="566928"/>
+          </a:xfrm>
+          <a:prstGeom prst="rect">
+            <a:avLst/>
+          </a:prstGeom>
+          <a:noFill/>
+          <a:ln/>
+        </p:spPr>
+        <p:txBody>
+          <a:bodyPr wrap="square" lIns="0" tIns="0" rIns="0" bIns="0" rtlCol="0" anchor="ctr"/>
+          <a:lstStyle/>
+          <a:p>
+            <a:pPr algn="r" indent="0" marL="0">
+              <a:buNone/>
+            </a:pPr>
+            <a:r>
+              <a:rPr lang="en-US" sz="1200" dirty="0">
+                <a:solidFill>
+                  <a:srgbClr val="8A9AA8"/>
+                </a:solidFill>
+                <a:latin typeface="Meiryo" pitchFamily="34" charset="0"/>
+                <a:ea typeface="Meiryo" pitchFamily="34" charset="-122"/>
+                <a:cs typeface="Meiryo" pitchFamily="34" charset="-120"/>
+              </a:rPr>
+              <a:t>p.6–9</a:t>
+            </a:r>
+            <a:endParaRPr lang="en-US" sz="1200" dirty="0"/>
+          </a:p>
+        </p:txBody>
+      </p:sp>
+      <p:sp>
+        <p:nvSpPr>
+          <p:cNvPr id="13" name="Badge 4"/>
+          <p:cNvSpPr/>
+          <p:nvPr/>
+        </p:nvSpPr>
+        <p:spPr>
+          <a:xfrm>
+            <a:off x="822960" y="4169664"/>
+            <a:ext cx="457200" cy="457200"/>
+          </a:xfrm>
+          <a:prstGeom prst="ellipse">
+            <a:avLst/>
+          </a:prstGeom>
+          <a:solidFill>
+            <a:srgbClr val="1C2B4A"/>
+          </a:solidFill>
+          <a:ln/>
+        </p:spPr>
+        <p:txBody>
+          <a:bodyPr wrap="square" lIns="0" tIns="0" rIns="0" bIns="0" rtlCol="0" anchor="ctr"/>
+          <a:lstStyle/>
+          <a:p>
+            <a:pPr algn="ctr" indent="0" marL="0">
+              <a:buNone/>
+            </a:pPr>
+            <a:r>
+              <a:rPr lang="en-US" sz="1600" b="1" dirty="0">
+                <a:solidFill>
+                  <a:srgbClr val="FFFFFF"/>
+                </a:solidFill>
+                <a:latin typeface="Meiryo" pitchFamily="34" charset="0"/>
+                <a:ea typeface="Meiryo" pitchFamily="34" charset="-122"/>
+                <a:cs typeface="Meiryo" pitchFamily="34" charset="-120"/>
+              </a:rPr>
+              <a:t>4</a:t>
+            </a:r>
+            <a:endParaRPr lang="en-US" sz="1600" dirty="0"/>
+          </a:p>
+        </p:txBody>
+      </p:sp>
+      <p:sp>
+        <p:nvSpPr>
+          <p:cNvPr id="14" name="Row 4"/>
+          <p:cNvSpPr/>
+          <p:nvPr/>
+        </p:nvSpPr>
+        <p:spPr>
+          <a:xfrm>
+            <a:off x="1463040" y="4114800"/>
+            <a:ext cx="8595360" cy="566928"/>
+          </a:xfrm>
+          <a:prstGeom prst="rect">
+            <a:avLst/>
+          </a:prstGeom>
+          <a:noFill/>
+          <a:ln/>
+        </p:spPr>
+        <p:txBody>
+          <a:bodyPr wrap="square" lIns="0" tIns="0" rIns="0" bIns="0" rtlCol="0" anchor="ctr"/>
+          <a:lstStyle/>
+          <a:p>
+            <a:pPr indent="0" marL="0">
+              <a:buNone/>
+            </a:pPr>
+            <a:r>
+              <a:rPr lang="en-US" sz="1500" b="1" dirty="0">
+                <a:solidFill>
+                  <a:srgbClr val="1C2B4A"/>
+                </a:solidFill>
+                <a:latin typeface="Meiryo" pitchFamily="34" charset="0"/>
+                <a:ea typeface="Meiryo" pitchFamily="34" charset="-122"/>
+                <a:cs typeface="Meiryo" pitchFamily="34" charset="-120"/>
+              </a:rPr>
+              <a:t>選定とポートフォリオ　</a:t>
+            </a:r>
+            <a:r>
+              <a:rPr lang="en-US" sz="1050" dirty="0">
+                <a:solidFill>
+                  <a:srgbClr val="5B6B7F"/>
+                </a:solidFill>
+                <a:latin typeface="Meiryo" pitchFamily="34" charset="0"/>
+                <a:ea typeface="Meiryo" pitchFamily="34" charset="-122"/>
+                <a:cs typeface="Meiryo" pitchFamily="34" charset="-120"/>
+              </a:rPr>
+              <a:t>方法論 ・ 選定の規律 ・ 最終15社 ・ ウェイト ・ 分散/長期保有</a:t>
+            </a:r>
+            <a:endParaRPr lang="en-US" sz="1200" dirty="0"/>
+          </a:p>
+        </p:txBody>
+      </p:sp>
+      <p:sp>
+        <p:nvSpPr>
+          <p:cNvPr id="15" name="Page 4"/>
+          <p:cNvSpPr/>
+          <p:nvPr/>
+        </p:nvSpPr>
+        <p:spPr>
+          <a:xfrm>
+            <a:off x="10241280" y="4114800"/>
+            <a:ext cx="1399032" cy="566928"/>
+          </a:xfrm>
+          <a:prstGeom prst="rect">
+            <a:avLst/>
+          </a:prstGeom>
+          <a:noFill/>
+          <a:ln/>
+        </p:spPr>
+        <p:txBody>
+          <a:bodyPr wrap="square" lIns="0" tIns="0" rIns="0" bIns="0" rtlCol="0" anchor="ctr"/>
+          <a:lstStyle/>
+          <a:p>
+            <a:pPr algn="r" indent="0" marL="0">
+              <a:buNone/>
+            </a:pPr>
+            <a:r>
+              <a:rPr lang="en-US" sz="1200" dirty="0">
+                <a:solidFill>
+                  <a:srgbClr val="8A9AA8"/>
+                </a:solidFill>
+                <a:latin typeface="Meiryo" pitchFamily="34" charset="0"/>
+                <a:ea typeface="Meiryo" pitchFamily="34" charset="-122"/>
+                <a:cs typeface="Meiryo" pitchFamily="34" charset="-120"/>
+              </a:rPr>
+              <a:t>p.10–14</a:t>
+            </a:r>
+            <a:endParaRPr lang="en-US" sz="1200" dirty="0"/>
+          </a:p>
+        </p:txBody>
+      </p:sp>
+      <p:sp>
+        <p:nvSpPr>
+          <p:cNvPr id="16" name="Badge 5"/>
+          <p:cNvSpPr/>
+          <p:nvPr/>
+        </p:nvSpPr>
+        <p:spPr>
+          <a:xfrm>
+            <a:off x="822960" y="4992624"/>
+            <a:ext cx="457200" cy="457200"/>
+          </a:xfrm>
+          <a:prstGeom prst="ellipse">
+            <a:avLst/>
+          </a:prstGeom>
+          <a:solidFill>
+            <a:srgbClr val="C0713A"/>
+          </a:solidFill>
+          <a:ln/>
+        </p:spPr>
+        <p:txBody>
+          <a:bodyPr wrap="square" lIns="0" tIns="0" rIns="0" bIns="0" rtlCol="0" anchor="ctr"/>
+          <a:lstStyle/>
+          <a:p>
+            <a:pPr algn="ctr" indent="0" marL="0">
+              <a:buNone/>
+            </a:pPr>
+            <a:r>
+              <a:rPr lang="en-US" sz="1600" b="1" dirty="0">
+                <a:solidFill>
+                  <a:srgbClr val="FFFFFF"/>
+                </a:solidFill>
+                <a:latin typeface="Meiryo" pitchFamily="34" charset="0"/>
+                <a:ea typeface="Meiryo" pitchFamily="34" charset="-122"/>
+                <a:cs typeface="Meiryo" pitchFamily="34" charset="-120"/>
+              </a:rPr>
+              <a:t>5</a:t>
+            </a:r>
+            <a:endParaRPr lang="en-US" sz="1600" dirty="0"/>
+          </a:p>
+        </p:txBody>
+      </p:sp>
+      <p:sp>
+        <p:nvSpPr>
+          <p:cNvPr id="17" name="Row 5"/>
+          <p:cNvSpPr/>
+          <p:nvPr/>
+        </p:nvSpPr>
+        <p:spPr>
+          <a:xfrm>
+            <a:off x="1463040" y="4937760"/>
+            <a:ext cx="8595360" cy="566928"/>
+          </a:xfrm>
+          <a:prstGeom prst="rect">
+            <a:avLst/>
+          </a:prstGeom>
+          <a:noFill/>
+          <a:ln/>
+        </p:spPr>
+        <p:txBody>
+          <a:bodyPr wrap="square" lIns="0" tIns="0" rIns="0" bIns="0" rtlCol="0" anchor="ctr"/>
+          <a:lstStyle/>
+          <a:p>
+            <a:pPr indent="0" marL="0">
+              <a:buNone/>
+            </a:pPr>
+            <a:r>
+              <a:rPr lang="en-US" sz="1500" b="1" dirty="0">
+                <a:solidFill>
+                  <a:srgbClr val="1C2B4A"/>
+                </a:solidFill>
+                <a:latin typeface="Meiryo" pitchFamily="34" charset="0"/>
+                <a:ea typeface="Meiryo" pitchFamily="34" charset="-122"/>
+                <a:cs typeface="Meiryo" pitchFamily="34" charset="-120"/>
+              </a:rPr>
+              <a:t>リスク・学習・計画　</a:t>
+            </a:r>
+            <a:r>
+              <a:rPr lang="en-US" sz="1050" dirty="0">
+                <a:solidFill>
+                  <a:srgbClr val="5B6B7F"/>
+                </a:solidFill>
+                <a:latin typeface="Meiryo" pitchFamily="34" charset="0"/>
+                <a:ea typeface="Meiryo" pitchFamily="34" charset="-122"/>
+                <a:cs typeface="Meiryo" pitchFamily="34" charset="-120"/>
+              </a:rPr>
+              <a:t>リスクシナリオ ・ 学習プロセス ・ Phase 3 ・ まとめ</a:t>
+            </a:r>
+            <a:endParaRPr lang="en-US" sz="1200" dirty="0"/>
+          </a:p>
+        </p:txBody>
+      </p:sp>
+      <p:sp>
+        <p:nvSpPr>
+          <p:cNvPr id="18" name="Page 5"/>
+          <p:cNvSpPr/>
+          <p:nvPr/>
+        </p:nvSpPr>
+        <p:spPr>
+          <a:xfrm>
+            <a:off x="10241280" y="4937760"/>
+            <a:ext cx="1399032" cy="566928"/>
+          </a:xfrm>
+          <a:prstGeom prst="rect">
+            <a:avLst/>
+          </a:prstGeom>
+          <a:noFill/>
+          <a:ln/>
+        </p:spPr>
+        <p:txBody>
+          <a:bodyPr wrap="square" lIns="0" tIns="0" rIns="0" bIns="0" rtlCol="0" anchor="ctr"/>
+          <a:lstStyle/>
+          <a:p>
+            <a:pPr algn="r" indent="0" marL="0">
+              <a:buNone/>
+            </a:pPr>
+            <a:r>
+              <a:rPr lang="en-US" sz="1200" dirty="0">
+                <a:solidFill>
+                  <a:srgbClr val="8A9AA8"/>
+                </a:solidFill>
+                <a:latin typeface="Meiryo" pitchFamily="34" charset="0"/>
+                <a:ea typeface="Meiryo" pitchFamily="34" charset="-122"/>
+                <a:cs typeface="Meiryo" pitchFamily="34" charset="-120"/>
+              </a:rPr>
+              <a:t>p.15–18</a:t>
+            </a:r>
+            <a:endParaRPr lang="en-US" sz="1200" dirty="0"/>
+          </a:p>
+        </p:txBody>
+      </p:sp>
+      <p:sp>
+        <p:nvSpPr>
+          <p:cNvPr id="19" name="Band"/>
+          <p:cNvSpPr/>
+          <p:nvPr/>
+        </p:nvSpPr>
+        <p:spPr>
+          <a:xfrm>
+            <a:off x="822960" y="5715000"/>
+            <a:ext cx="10543032" cy="502920"/>
+          </a:xfrm>
+          <a:prstGeom prst="rect">
+            <a:avLst/>
+          </a:prstGeom>
+          <a:noFill/>
+          <a:ln/>
+        </p:spPr>
+        <p:txBody>
+          <a:bodyPr wrap="square" lIns="0" tIns="0" rIns="0" bIns="0" rtlCol="0" anchor="ctr"/>
+          <a:lstStyle/>
+          <a:p>
+            <a:pPr indent="0" marL="0">
+              <a:buNone/>
+            </a:pPr>
+            <a:r>
+              <a:rPr lang="en-US" sz="1350" b="1" dirty="0">
+                <a:solidFill>
+                  <a:srgbClr val="1C2B4A"/>
+                </a:solidFill>
+                <a:latin typeface="Meiryo" pitchFamily="34" charset="0"/>
+                <a:ea typeface="Meiryo" pitchFamily="34" charset="-122"/>
+                <a:cs typeface="Meiryo" pitchFamily="34" charset="-120"/>
+              </a:rPr>
+              <a:t>コアメッセージ ＝ </a:t>
+            </a:r>
+            <a:r>
+              <a:rPr lang="en-US" sz="1150" dirty="0">
+                <a:solidFill>
+                  <a:srgbClr val="5B6B7F"/>
+                </a:solidFill>
+                <a:latin typeface="Meiryo" pitchFamily="34" charset="0"/>
+                <a:ea typeface="Meiryo" pitchFamily="34" charset="-122"/>
+                <a:cs typeface="Meiryo" pitchFamily="34" charset="-120"/>
+              </a:rPr>
+              <a:t>「世界首位級は、地方にある」— 東証4,438社から、規律あるゲートで15社へ</a:t>
+            </a:r>
+            <a:endParaRPr lang="en-US" sz="1200" dirty="0"/>
+          </a:p>
+        </p:txBody>
+      </p:sp>
+      <p:sp>
+        <p:nvSpPr>
+          <p:cNvPr id="20" name="Footer"/>
+          <p:cNvSpPr/>
+          <p:nvPr/>
+        </p:nvSpPr>
+        <p:spPr>
+          <a:xfrm>
+            <a:off x="548640" y="6473952"/>
+            <a:ext cx="7315200" cy="237744"/>
+          </a:xfrm>
+          <a:prstGeom prst="rect">
+            <a:avLst/>
+          </a:prstGeom>
+          <a:noFill/>
+          <a:ln/>
+        </p:spPr>
+        <p:txBody>
+          <a:bodyPr wrap="square" lIns="0" tIns="0" rIns="0" bIns="0" rtlCol="0" anchor="ctr"/>
+          <a:lstStyle/>
+          <a:p>
+            <a:pPr indent="0" marL="0">
+              <a:buNone/>
+            </a:pPr>
+            <a:r>
+              <a:rPr lang="en-US" sz="850" dirty="0">
+                <a:solidFill>
+                  <a:srgbClr val="8A9AA8"/>
+                </a:solidFill>
+                <a:latin typeface="Meiryo" pitchFamily="34" charset="0"/>
+                <a:ea typeface="Meiryo" pitchFamily="34" charset="-122"/>
+                <a:cs typeface="Meiryo" pitchFamily="34" charset="-120"/>
+              </a:rPr>
+              <a:t>日経ストックリーグ 2026｜後工程ニッチトップ × 地方クラスター</a:t>
+            </a:r>
+            <a:endParaRPr lang="en-US" sz="1200" dirty="0"/>
+          </a:p>
+        </p:txBody>
+      </p:sp>
+      <p:sp>
+        <p:nvSpPr>
+          <p:cNvPr id="21" name="PageNum"/>
+          <p:cNvSpPr/>
+          <p:nvPr/>
+        </p:nvSpPr>
+        <p:spPr>
+          <a:xfrm>
+            <a:off x="11430000" y="6473952"/>
+            <a:ext cx="365760" cy="237744"/>
+          </a:xfrm>
+          <a:prstGeom prst="rect">
+            <a:avLst/>
+          </a:prstGeom>
+          <a:noFill/>
+          <a:ln/>
+        </p:spPr>
+        <p:txBody>
+          <a:bodyPr wrap="square" lIns="0" tIns="0" rIns="0" bIns="0" rtlCol="0" anchor="ctr"/>
+          <a:lstStyle/>
+          <a:p>
+            <a:pPr algn="r" indent="0" marL="0">
+              <a:buNone/>
+            </a:pPr>
+            <a:r>
+              <a:rPr lang="en-US" sz="900" dirty="0">
+                <a:solidFill>
+                  <a:srgbClr val="8A9AA8"/>
+                </a:solidFill>
+                <a:latin typeface="Meiryo" pitchFamily="34" charset="0"/>
+                <a:ea typeface="Meiryo" pitchFamily="34" charset="-122"/>
+                <a:cs typeface="Meiryo" pitchFamily="34" charset="-120"/>
+              </a:rPr>
+              <a:t>2</a:t>
+            </a:r>
+            <a:endParaRPr lang="en-US" sz="1200" dirty="0"/>
+          </a:p>
+        </p:txBody>
+      </p:sp>
+    </p:spTree>
+  </p:cSld>
+  <p:clrMapOvr>
+    <a:masterClrMapping/>
+  </p:clrMapOvr>
+</p:sld>
+</file>
+
 <file path=ppt/slides/slide2.xml><?xml version="1.0" encoding="utf-8"?>
 <p:sld xmlns:a="http://schemas.openxmlformats.org/drawingml/2006/main" xmlns:r="http://schemas.openxmlformats.org/officeDocument/2006/relationships" xmlns:p="http://schemas.openxmlformats.org/presentationml/2006/main">
   <p:cSld name="Slide 2">
@@ -15798,7 +16775,7 @@
                 <a:ea typeface="Meiryo" pitchFamily="34" charset="-122"/>
                 <a:cs typeface="Meiryo" pitchFamily="34" charset="-120"/>
               </a:rPr>
-              <a:t>2</a:t>
+              <a:t>3</a:t>
             </a:r>
             <a:endParaRPr lang="en-US" sz="900" dirty="0"/>
           </a:p>
@@ -16912,7 +17889,7 @@
                 <a:ea typeface="Meiryo" pitchFamily="34" charset="-122"/>
                 <a:cs typeface="Meiryo" pitchFamily="34" charset="-120"/>
               </a:rPr>
-              <a:t>3</a:t>
+              <a:t>4</a:t>
             </a:r>
             <a:endParaRPr lang="en-US" sz="900" dirty="0"/>
           </a:p>
@@ -18027,7 +19004,7 @@
                 <a:ea typeface="Meiryo" pitchFamily="34" charset="-122"/>
                 <a:cs typeface="Meiryo" pitchFamily="34" charset="-120"/>
               </a:rPr>
-              <a:t>4</a:t>
+              <a:t>5</a:t>
             </a:r>
             <a:endParaRPr lang="en-US" sz="900" dirty="0"/>
           </a:p>
@@ -19398,7 +20375,7 @@
                 <a:ea typeface="Meiryo" pitchFamily="34" charset="-122"/>
                 <a:cs typeface="Meiryo" pitchFamily="34" charset="-120"/>
               </a:rPr>
-              <a:t>5</a:t>
+              <a:t>6</a:t>
             </a:r>
             <a:endParaRPr lang="en-US" sz="900" dirty="0"/>
           </a:p>
@@ -20331,7 +21308,7 @@
                 <a:ea typeface="Meiryo" pitchFamily="34" charset="-122"/>
                 <a:cs typeface="Meiryo" pitchFamily="34" charset="-120"/>
               </a:rPr>
-              <a:t>6</a:t>
+              <a:t>7</a:t>
             </a:r>
             <a:endParaRPr lang="en-US" sz="900" dirty="0"/>
           </a:p>
@@ -21269,7 +22246,7 @@
                 <a:ea typeface="Meiryo" pitchFamily="34" charset="-122"/>
                 <a:cs typeface="Meiryo" pitchFamily="34" charset="-120"/>
               </a:rPr>
-              <a:t>7</a:t>
+              <a:t>8</a:t>
             </a:r>
             <a:endParaRPr lang="en-US" sz="900" dirty="0"/>
           </a:p>
@@ -22232,7 +23209,7 @@
                 <a:ea typeface="Meiryo" pitchFamily="34" charset="-122"/>
                 <a:cs typeface="Meiryo" pitchFamily="34" charset="-120"/>
               </a:rPr>
-              <a:t>8</a:t>
+              <a:t>9</a:t>
             </a:r>
             <a:endParaRPr lang="en-US" sz="900" dirty="0"/>
           </a:p>
@@ -22962,7 +23939,7 @@
                 <a:ea typeface="Meiryo" pitchFamily="34" charset="-122"/>
                 <a:cs typeface="Meiryo" pitchFamily="34" charset="-120"/>
               </a:rPr>
-              <a:t>9</a:t>
+              <a:t>10</a:t>
             </a:r>
             <a:endParaRPr lang="en-US" sz="900" dirty="0"/>
           </a:p>
